--- a/BDA/00-overview.pptx
+++ b/BDA/00-overview.pptx
@@ -5,10 +5,10 @@
     <p:sldMasterId id="2147483648" r:id="rId1"/>
   </p:sldMasterIdLst>
   <p:notesMasterIdLst>
-    <p:notesMasterId r:id="rId30"/>
+    <p:notesMasterId r:id="rId31"/>
   </p:notesMasterIdLst>
   <p:handoutMasterIdLst>
-    <p:handoutMasterId r:id="rId31"/>
+    <p:handoutMasterId r:id="rId32"/>
   </p:handoutMasterIdLst>
   <p:sldIdLst>
     <p:sldId id="256" r:id="rId2"/>
@@ -34,11 +34,12 @@
     <p:sldId id="422" r:id="rId22"/>
     <p:sldId id="423" r:id="rId23"/>
     <p:sldId id="424" r:id="rId24"/>
-    <p:sldId id="420" r:id="rId25"/>
-    <p:sldId id="358" r:id="rId26"/>
-    <p:sldId id="357" r:id="rId27"/>
-    <p:sldId id="436" r:id="rId28"/>
-    <p:sldId id="293" r:id="rId29"/>
+    <p:sldId id="447" r:id="rId25"/>
+    <p:sldId id="420" r:id="rId26"/>
+    <p:sldId id="358" r:id="rId27"/>
+    <p:sldId id="357" r:id="rId28"/>
+    <p:sldId id="436" r:id="rId29"/>
+    <p:sldId id="293" r:id="rId30"/>
   </p:sldIdLst>
   <p:sldSz cx="9144000" cy="6858000" type="screen4x3"/>
   <p:notesSz cx="6669088" cy="9928225"/>
@@ -2384,7 +2385,7 @@
                   <a:spcPct val="0"/>
                 </a:spcBef>
               </a:pPr>
-              <a:t>25</a:t>
+              <a:t>26</a:t>
             </a:fld>
             <a:endParaRPr lang="en-US" altLang="zh-TW"/>
           </a:p>
@@ -2603,7 +2604,7 @@
                   <a:spcPct val="0"/>
                 </a:spcBef>
               </a:pPr>
-              <a:t>28</a:t>
+              <a:t>29</a:t>
             </a:fld>
             <a:endParaRPr lang="en-US" altLang="zh-TW"/>
           </a:p>
@@ -8002,7 +8003,7 @@
             <a:pPr eaLnBrk="1" hangingPunct="1"/>
             <a:r>
               <a:rPr lang="en-US" altLang="zh-TW" dirty="0"/>
-              <a:t>Sep. 3, 2026</a:t>
+              <a:t>Sep. 7, 2026</a:t>
             </a:r>
           </a:p>
         </p:txBody>
@@ -8802,7 +8803,7 @@
             </a:r>
             <a:r>
               <a:rPr lang="en-US" altLang="zh-TW" b="1" dirty="0"/>
-              <a:t>DM4] Ch.1-2, 4-5, 6, 7 (part), 8</a:t>
+              <a:t>DM4] Ch.1-2, 4, 6, 7 (part), 8</a:t>
             </a:r>
             <a:endParaRPr lang="en-US" altLang="zh-TW" dirty="0"/>
           </a:p>
@@ -15104,14 +15105,14 @@
             <p:ph idx="1"/>
             <p:extLst>
               <p:ext uri="{D42A27DB-BD31-4B8C-83A1-F6EECF244321}">
-                <p14:modId xmlns:p14="http://schemas.microsoft.com/office/powerpoint/2010/main" val="939034045"/>
+                <p14:modId xmlns:p14="http://schemas.microsoft.com/office/powerpoint/2010/main" val="2475107431"/>
               </p:ext>
             </p:extLst>
           </p:nvPr>
         </p:nvGraphicFramePr>
         <p:xfrm>
           <a:off x="457200" y="1241425"/>
-          <a:ext cx="8229600" cy="4851400"/>
+          <a:ext cx="8229600" cy="5125720"/>
         </p:xfrm>
         <a:graphic>
           <a:graphicData uri="http://schemas.openxmlformats.org/drawingml/2006/table">
@@ -15284,7 +15285,6 @@
                           <a:latin typeface="+mn-lt"/>
                           <a:ea typeface="+mn-ea"/>
                           <a:cs typeface="+mn-cs"/>
-                          <a:hlinkClick r:id="rId2"/>
                         </a:rPr>
                         <a:t>Ch.1, Introduction</a:t>
                       </a:r>
@@ -15384,11 +15384,24 @@
                         <a:defRPr/>
                       </a:pPr>
                       <a:r>
-                        <a:rPr lang="en-US" altLang="zh-TW" dirty="0"/>
+                        <a:rPr lang="en-US" altLang="zh-TW" dirty="0">
+                          <a:solidFill>
+                            <a:srgbClr val="FF0000"/>
+                          </a:solidFill>
+                        </a:rPr>
                         <a:t>(Leave for Czech project)</a:t>
                       </a:r>
                       <a:endParaRPr lang="en-US" altLang="zh-TW" dirty="0">
-                        <a:hlinkClick r:id="rId3"/>
+                        <a:solidFill>
+                          <a:srgbClr val="FF0000"/>
+                        </a:solidFill>
+                        <a:hlinkClick r:id="rId2">
+                          <a:extLst>
+                            <a:ext uri="{A12FA001-AC4F-418D-AE19-62706E023703}">
+                              <ahyp:hlinkClr xmlns:ahyp="http://schemas.microsoft.com/office/drawing/2018/hyperlinkcolor" val="tx"/>
+                            </a:ext>
+                          </a:extLst>
+                        </a:hlinkClick>
                       </a:endParaRPr>
                     </a:p>
                   </a:txBody>
@@ -15467,11 +15480,24 @@
                     <a:lstStyle/>
                     <a:p>
                       <a:r>
-                        <a:rPr lang="en-US" dirty="0"/>
+                        <a:rPr lang="en-US" dirty="0">
+                          <a:solidFill>
+                            <a:srgbClr val="FF0000"/>
+                          </a:solidFill>
+                        </a:rPr>
                         <a:t>(Leave for Czech project)</a:t>
                       </a:r>
                       <a:endParaRPr lang="en-US" dirty="0">
-                        <a:hlinkClick r:id="rId3"/>
+                        <a:solidFill>
+                          <a:srgbClr val="FF0000"/>
+                        </a:solidFill>
+                        <a:hlinkClick r:id="rId2">
+                          <a:extLst>
+                            <a:ext uri="{A12FA001-AC4F-418D-AE19-62706E023703}">
+                              <ahyp:hlinkClr xmlns:ahyp="http://schemas.microsoft.com/office/drawing/2018/hyperlinkcolor" val="tx"/>
+                            </a:ext>
+                          </a:extLst>
+                        </a:hlinkClick>
                       </a:endParaRPr>
                     </a:p>
                   </a:txBody>
@@ -15557,25 +15583,46 @@
                       <a:r>
                         <a:rPr lang="en-US" altLang="zh-TW" sz="1800" b="0" i="0" kern="1200" dirty="0">
                           <a:solidFill>
+                            <a:srgbClr val="FF0000"/>
+                          </a:solidFill>
+                          <a:effectLst/>
+                          <a:latin typeface="+mn-lt"/>
+                          <a:ea typeface="+mn-ea"/>
+                          <a:cs typeface="+mn-cs"/>
+                        </a:rPr>
+                        <a:t>(9/28: Teachers’ Day)</a:t>
+                      </a:r>
+                    </a:p>
+                    <a:p>
+                      <a:pPr marL="0" marR="0" lvl="0" indent="0" algn="l" defTabSz="914400" rtl="0" eaLnBrk="1" fontAlgn="auto" latinLnBrk="0" hangingPunct="1">
+                        <a:lnSpc>
+                          <a:spcPct val="100000"/>
+                        </a:lnSpc>
+                        <a:spcBef>
+                          <a:spcPts val="0"/>
+                        </a:spcBef>
+                        <a:spcAft>
+                          <a:spcPts val="0"/>
+                        </a:spcAft>
+                        <a:buClrTx/>
+                        <a:buSzTx/>
+                        <a:buFontTx/>
+                        <a:buNone/>
+                        <a:tabLst/>
+                        <a:defRPr/>
+                      </a:pPr>
+                      <a:r>
+                        <a:rPr lang="en-US" altLang="zh-TW" sz="1800" b="0" i="0" kern="1200" dirty="0">
+                          <a:solidFill>
                             <a:schemeClr val="dk1"/>
                           </a:solidFill>
                           <a:effectLst/>
                           <a:latin typeface="+mn-lt"/>
                           <a:ea typeface="+mn-ea"/>
                           <a:cs typeface="+mn-cs"/>
-                          <a:hlinkClick r:id="rId4"/>
                         </a:rPr>
                         <a:t>Ch.2, Data, Measurements, and Data Preprocessing</a:t>
                       </a:r>
-                      <a:endParaRPr lang="en-US" altLang="zh-TW" sz="1800" b="0" i="0" kern="1200" dirty="0">
-                        <a:solidFill>
-                          <a:schemeClr val="dk1"/>
-                        </a:solidFill>
-                        <a:effectLst/>
-                        <a:latin typeface="+mn-lt"/>
-                        <a:ea typeface="+mn-ea"/>
-                        <a:cs typeface="+mn-cs"/>
-                      </a:endParaRPr>
                     </a:p>
                   </a:txBody>
                   <a:tcPr/>
@@ -15674,7 +15721,6 @@
                           <a:latin typeface="+mn-lt"/>
                           <a:ea typeface="+mn-ea"/>
                           <a:cs typeface="+mn-cs"/>
-                          <a:hlinkClick r:id="rId5"/>
                         </a:rPr>
                         <a:t>Ch.4, Pattern Mining: Basic Concepts and Methods</a:t>
                       </a:r>
@@ -15824,7 +15870,6 @@
                           <a:latin typeface="+mn-lt"/>
                           <a:ea typeface="+mn-ea"/>
                           <a:cs typeface="+mn-cs"/>
-                          <a:hlinkClick r:id="rId6"/>
                         </a:rPr>
                         <a:t>Ch.5, Pattern Mining: Advanced Methods</a:t>
                       </a:r>
@@ -15932,7 +15977,6 @@
                           <a:latin typeface="+mn-lt"/>
                           <a:ea typeface="+mn-ea"/>
                           <a:cs typeface="+mn-cs"/>
-                          <a:hlinkClick r:id="rId7"/>
                         </a:rPr>
                         <a:t>Ch.6, Classification: Basic Concepts</a:t>
                       </a:r>
@@ -17065,7 +17109,7 @@
             <p:ph idx="1"/>
             <p:extLst>
               <p:ext uri="{D42A27DB-BD31-4B8C-83A1-F6EECF244321}">
-                <p14:modId xmlns:p14="http://schemas.microsoft.com/office/powerpoint/2010/main" val="2098974767"/>
+                <p14:modId xmlns:p14="http://schemas.microsoft.com/office/powerpoint/2010/main" val="3865710132"/>
               </p:ext>
             </p:extLst>
           </p:nvPr>
@@ -17323,7 +17367,6 @@
                           <a:latin typeface="+mn-lt"/>
                           <a:ea typeface="+mn-ea"/>
                           <a:cs typeface="+mn-cs"/>
-                          <a:hlinkClick r:id="rId2"/>
                         </a:rPr>
                         <a:t>Ch.8, Cluster Analysis: Basic Concepts and Methods</a:t>
                       </a:r>
@@ -17463,7 +17506,6 @@
                           <a:latin typeface="+mn-lt"/>
                           <a:ea typeface="+mn-ea"/>
                           <a:cs typeface="+mn-cs"/>
-                          <a:hlinkClick r:id="rId3"/>
                         </a:rPr>
                         <a:t>Ch.7, Classification: Advanced Methods</a:t>
                       </a:r>
@@ -17563,39 +17605,53 @@
                         <a:defRPr/>
                       </a:pPr>
                       <a:r>
-                        <a:rPr lang="en-US" altLang="zh-TW" sz="1800" dirty="0"/>
+                        <a:rPr lang="en-US" altLang="zh-TW" sz="1800" dirty="0">
+                          <a:solidFill>
+                            <a:srgbClr val="FF0000"/>
+                          </a:solidFill>
+                        </a:rPr>
                         <a:t>(</a:t>
-                      </a:r>
-                      <a:r>
-                        <a:rPr lang="en-US" altLang="zh-TW" sz="1800" b="1" dirty="0"/>
-                        <a:t>1</a:t>
                       </a:r>
                       <a:r>
                         <a:rPr lang="en-US" altLang="zh-TW" sz="1800" b="1" dirty="0">
                           <a:solidFill>
-                            <a:schemeClr val="tx1"/>
+                            <a:srgbClr val="FF0000"/>
                           </a:solidFill>
                         </a:rPr>
-                        <a:t>1/16</a:t>
+                        <a:t>11/16</a:t>
                       </a:r>
                       <a:r>
-                        <a:rPr lang="en-US" altLang="zh-TW" sz="1800" dirty="0"/>
+                        <a:rPr lang="en-US" altLang="zh-TW" sz="1800" dirty="0">
+                          <a:solidFill>
+                            <a:srgbClr val="FF0000"/>
+                          </a:solidFill>
+                        </a:rPr>
                         <a:t>: Midterm)</a:t>
                       </a:r>
                       <a:r>
                         <a:rPr lang="hsb-DE" altLang="zh-TW" sz="1800" b="0" i="0" kern="1200" dirty="0">
                           <a:solidFill>
-                            <a:schemeClr val="dk1"/>
+                            <a:srgbClr val="FF0000"/>
                           </a:solidFill>
                           <a:effectLst/>
                           <a:latin typeface="+mn-lt"/>
                           <a:ea typeface="+mn-ea"/>
                           <a:cs typeface="+mn-cs"/>
-                          <a:hlinkClick r:id="rId3"/>
+                          <a:hlinkClick r:id="rId2">
+                            <a:extLst>
+                              <a:ext uri="{A12FA001-AC4F-418D-AE19-62706E023703}">
+                                <ahyp:hlinkClr xmlns:ahyp="http://schemas.microsoft.com/office/drawing/2018/hyperlinkcolor" val="tx"/>
+                              </a:ext>
+                            </a:extLst>
+                          </a:hlinkClick>
                         </a:rPr>
                         <a:t> </a:t>
                       </a:r>
-                      <a:endParaRPr lang="zh-TW" altLang="en-US" sz="1800" dirty="0"/>
+                      <a:endParaRPr lang="zh-TW" altLang="en-US" sz="1800" dirty="0">
+                        <a:solidFill>
+                          <a:srgbClr val="FF0000"/>
+                        </a:solidFill>
+                      </a:endParaRPr>
                     </a:p>
                   </a:txBody>
                   <a:tcPr marT="45729" marB="45729"/>
@@ -17686,12 +17742,9 @@
                     <a:lstStyle/>
                     <a:p>
                       <a:r>
-                        <a:rPr lang="en-US" dirty="0">
-                          <a:hlinkClick r:id="rId4"/>
-                        </a:rPr>
+                        <a:rPr lang="en-US" dirty="0"/>
                         <a:t>Ch.9, Cluster Analysis: Advanced Methods</a:t>
                       </a:r>
-                      <a:endParaRPr lang="en-US" dirty="0"/>
                     </a:p>
                   </a:txBody>
                   <a:tcPr anchor="ctr"/>
@@ -17831,21 +17884,8 @@
                           <a:latin typeface="+mn-lt"/>
                           <a:ea typeface="+mn-ea"/>
                           <a:cs typeface="+mn-cs"/>
-                          <a:hlinkClick r:id="rId5"/>
                         </a:rPr>
-                        <a:t>Distributed Platforms</a:t>
-                      </a:r>
-                      <a:r>
-                        <a:rPr lang="en-US" altLang="zh-TW" sz="1800" b="0" i="0" kern="1200" dirty="0">
-                          <a:solidFill>
-                            <a:schemeClr val="dk1"/>
-                          </a:solidFill>
-                          <a:effectLst/>
-                          <a:latin typeface="+mn-lt"/>
-                          <a:ea typeface="+mn-ea"/>
-                          <a:cs typeface="+mn-cs"/>
-                        </a:rPr>
-                        <a:t>: Hadoop, Spark </a:t>
+                        <a:t>Distributed Platforms: Hadoop, Spark </a:t>
                       </a:r>
                     </a:p>
                     <a:p>
@@ -17858,7 +17898,6 @@
                           <a:latin typeface="+mn-lt"/>
                           <a:ea typeface="+mn-ea"/>
                           <a:cs typeface="+mn-cs"/>
-                          <a:hlinkClick r:id="rId6"/>
                         </a:rPr>
                         <a:t>MapReduce</a:t>
                       </a:r>
@@ -17871,7 +17910,6 @@
                           <a:latin typeface="+mn-lt"/>
                           <a:ea typeface="+mn-ea"/>
                           <a:cs typeface="+mn-cs"/>
-                          <a:hlinkClick r:id="rId6"/>
                         </a:rPr>
                         <a:t> Programming</a:t>
                       </a:r>
@@ -17962,7 +18000,6 @@
                           <a:latin typeface="+mn-lt"/>
                           <a:ea typeface="+mn-ea"/>
                           <a:cs typeface="+mn-cs"/>
-                          <a:hlinkClick r:id="rId7"/>
                         </a:rPr>
                         <a:t>Spark Programming</a:t>
                       </a:r>
@@ -18074,7 +18111,7 @@
             <p:ph idx="1"/>
             <p:extLst>
               <p:ext uri="{D42A27DB-BD31-4B8C-83A1-F6EECF244321}">
-                <p14:modId xmlns:p14="http://schemas.microsoft.com/office/powerpoint/2010/main" val="854831359"/>
+                <p14:modId xmlns:p14="http://schemas.microsoft.com/office/powerpoint/2010/main" val="4046662047"/>
               </p:ext>
             </p:extLst>
           </p:nvPr>
@@ -18222,14 +18259,26 @@
                     <a:lstStyle/>
                     <a:p>
                       <a:r>
-                        <a:rPr lang="en-US" altLang="zh-TW" sz="1800" dirty="0"/>
+                        <a:rPr lang="en-US" altLang="zh-TW" sz="1800" dirty="0">
+                          <a:solidFill>
+                            <a:srgbClr val="0000FF"/>
+                          </a:solidFill>
+                        </a:rPr>
                         <a:t>Term Project Presentation: Week</a:t>
                       </a:r>
                       <a:r>
-                        <a:rPr lang="en-US" altLang="zh-TW" sz="1800" baseline="0" dirty="0"/>
+                        <a:rPr lang="en-US" altLang="zh-TW" sz="1800" baseline="0" dirty="0">
+                          <a:solidFill>
+                            <a:srgbClr val="0000FF"/>
+                          </a:solidFill>
+                        </a:rPr>
                         <a:t> 1</a:t>
                       </a:r>
-                      <a:endParaRPr lang="zh-TW" altLang="en-US" sz="1800" dirty="0"/>
+                      <a:endParaRPr lang="zh-TW" altLang="en-US" sz="1800" dirty="0">
+                        <a:solidFill>
+                          <a:srgbClr val="0000FF"/>
+                        </a:solidFill>
+                      </a:endParaRPr>
                     </a:p>
                   </a:txBody>
                   <a:tcPr marT="45682" marB="45682"/>
@@ -18291,14 +18340,26 @@
                     <a:lstStyle/>
                     <a:p>
                       <a:r>
-                        <a:rPr lang="en-US" altLang="zh-TW" sz="1800" dirty="0"/>
+                        <a:rPr lang="en-US" altLang="zh-TW" sz="1800" dirty="0">
+                          <a:solidFill>
+                            <a:srgbClr val="0000FF"/>
+                          </a:solidFill>
+                        </a:rPr>
                         <a:t>Term Project Presentation: Week</a:t>
                       </a:r>
                       <a:r>
-                        <a:rPr lang="en-US" altLang="zh-TW" sz="1800" baseline="0" dirty="0"/>
+                        <a:rPr lang="en-US" altLang="zh-TW" sz="1800" baseline="0" dirty="0">
+                          <a:solidFill>
+                            <a:srgbClr val="0000FF"/>
+                          </a:solidFill>
+                        </a:rPr>
                         <a:t> 2</a:t>
                       </a:r>
-                      <a:endParaRPr lang="zh-TW" altLang="en-US" sz="1800" dirty="0"/>
+                      <a:endParaRPr lang="zh-TW" altLang="en-US" sz="1800" dirty="0">
+                        <a:solidFill>
+                          <a:srgbClr val="0000FF"/>
+                        </a:solidFill>
+                      </a:endParaRPr>
                     </a:p>
                   </a:txBody>
                   <a:tcPr marT="45682" marB="45682"/>
@@ -18342,10 +18403,7 @@
                   </a:txBody>
                   <a:tcPr marT="45682" marB="45682">
                     <a:solidFill>
-                      <a:schemeClr val="accent2">
-                        <a:lumMod val="40000"/>
-                        <a:lumOff val="60000"/>
-                      </a:schemeClr>
+                      <a:srgbClr val="FFFF99"/>
                     </a:solidFill>
                   </a:tcPr>
                 </a:tc>
@@ -18369,10 +18427,7 @@
                   </a:txBody>
                   <a:tcPr marT="45682" marB="45682">
                     <a:solidFill>
-                      <a:schemeClr val="accent2">
-                        <a:lumMod val="40000"/>
-                        <a:lumOff val="60000"/>
-                      </a:schemeClr>
+                      <a:srgbClr val="FFFF99"/>
                     </a:solidFill>
                   </a:tcPr>
                 </a:tc>
@@ -18382,27 +18437,36 @@
                     <a:lstStyle/>
                     <a:p>
                       <a:r>
-                        <a:rPr lang="en-US" altLang="zh-TW" sz="1800" dirty="0"/>
+                        <a:rPr lang="en-US" altLang="zh-TW" sz="1800" dirty="0">
+                          <a:solidFill>
+                            <a:srgbClr val="0000FF"/>
+                          </a:solidFill>
+                        </a:rPr>
                         <a:t>Term Project Presentation: Week</a:t>
                       </a:r>
                       <a:r>
-                        <a:rPr lang="en-US" altLang="zh-TW" sz="1800" baseline="0" dirty="0"/>
+                        <a:rPr lang="en-US" altLang="zh-TW" sz="1800" baseline="0" dirty="0">
+                          <a:solidFill>
+                            <a:srgbClr val="0000FF"/>
+                          </a:solidFill>
+                        </a:rPr>
                         <a:t> 3</a:t>
                       </a:r>
                     </a:p>
                     <a:p>
                       <a:r>
-                        <a:rPr lang="en-US" altLang="zh-TW" sz="1800" baseline="0" dirty="0"/>
+                        <a:rPr lang="en-US" altLang="zh-TW" sz="1800" baseline="0" dirty="0">
+                          <a:solidFill>
+                            <a:srgbClr val="0000FF"/>
+                          </a:solidFill>
+                        </a:rPr>
                         <a:t>(online)</a:t>
                       </a:r>
                     </a:p>
                   </a:txBody>
                   <a:tcPr marT="45682" marB="45682">
                     <a:solidFill>
-                      <a:schemeClr val="accent2">
-                        <a:lumMod val="40000"/>
-                        <a:lumOff val="60000"/>
-                      </a:schemeClr>
+                      <a:srgbClr val="FFFF99"/>
                     </a:solidFill>
                   </a:tcPr>
                 </a:tc>
@@ -18416,10 +18480,7 @@
                   </a:txBody>
                   <a:tcPr marT="45682" marB="45682">
                     <a:solidFill>
-                      <a:schemeClr val="accent2">
-                        <a:lumMod val="40000"/>
-                        <a:lumOff val="60000"/>
-                      </a:schemeClr>
+                      <a:srgbClr val="FFFF99"/>
                     </a:solidFill>
                   </a:tcPr>
                 </a:tc>
@@ -18452,10 +18513,7 @@
                   </a:txBody>
                   <a:tcPr marT="45682" marB="45682">
                     <a:solidFill>
-                      <a:schemeClr val="accent2">
-                        <a:lumMod val="40000"/>
-                        <a:lumOff val="60000"/>
-                      </a:schemeClr>
+                      <a:srgbClr val="FFFF99"/>
                     </a:solidFill>
                   </a:tcPr>
                 </a:tc>
@@ -18479,10 +18537,7 @@
                   </a:txBody>
                   <a:tcPr marT="45682" marB="45682">
                     <a:solidFill>
-                      <a:schemeClr val="accent2">
-                        <a:lumMod val="40000"/>
-                        <a:lumOff val="60000"/>
-                      </a:schemeClr>
+                      <a:srgbClr val="FFFF99"/>
                     </a:solidFill>
                   </a:tcPr>
                 </a:tc>
@@ -18492,28 +18547,41 @@
                     <a:lstStyle/>
                     <a:p>
                       <a:r>
-                        <a:rPr lang="en-US" altLang="zh-TW" sz="1800" dirty="0"/>
+                        <a:rPr lang="en-US" altLang="zh-TW" sz="1800" dirty="0">
+                          <a:solidFill>
+                            <a:srgbClr val="0000FF"/>
+                          </a:solidFill>
+                        </a:rPr>
                         <a:t>Term Project Presentation: Week</a:t>
                       </a:r>
                       <a:r>
-                        <a:rPr lang="en-US" altLang="zh-TW" sz="1800" baseline="0" dirty="0"/>
+                        <a:rPr lang="en-US" altLang="zh-TW" sz="1800" baseline="0" dirty="0">
+                          <a:solidFill>
+                            <a:srgbClr val="0000FF"/>
+                          </a:solidFill>
+                        </a:rPr>
                         <a:t> 4</a:t>
                       </a:r>
                     </a:p>
                     <a:p>
                       <a:r>
-                        <a:rPr lang="en-US" altLang="zh-TW" sz="1800" baseline="0" dirty="0"/>
+                        <a:rPr lang="en-US" altLang="zh-TW" sz="1800" baseline="0" dirty="0">
+                          <a:solidFill>
+                            <a:srgbClr val="0000FF"/>
+                          </a:solidFill>
+                        </a:rPr>
                         <a:t>(online)</a:t>
                       </a:r>
-                      <a:endParaRPr lang="zh-TW" altLang="en-US" sz="1800" dirty="0"/>
+                      <a:endParaRPr lang="zh-TW" altLang="en-US" sz="1800" dirty="0">
+                        <a:solidFill>
+                          <a:srgbClr val="0000FF"/>
+                        </a:solidFill>
+                      </a:endParaRPr>
                     </a:p>
                   </a:txBody>
                   <a:tcPr marT="45682" marB="45682">
                     <a:solidFill>
-                      <a:schemeClr val="accent2">
-                        <a:lumMod val="40000"/>
-                        <a:lumOff val="60000"/>
-                      </a:schemeClr>
+                      <a:srgbClr val="FFFF99"/>
                     </a:solidFill>
                   </a:tcPr>
                 </a:tc>
@@ -18539,10 +18607,7 @@
                   </a:txBody>
                   <a:tcPr marT="45682" marB="45682">
                     <a:solidFill>
-                      <a:schemeClr val="accent2">
-                        <a:lumMod val="40000"/>
-                        <a:lumOff val="60000"/>
-                      </a:schemeClr>
+                      <a:srgbClr val="FFFF99"/>
                     </a:solidFill>
                   </a:tcPr>
                 </a:tc>
@@ -19082,6 +19147,226 @@
       </p:grpSpPr>
       <p:sp>
         <p:nvSpPr>
+          <p:cNvPr id="2" name="標題 1">
+            <a:extLst>
+              <a:ext uri="{FF2B5EF4-FFF2-40B4-BE49-F238E27FC236}">
+                <a16:creationId xmlns:a16="http://schemas.microsoft.com/office/drawing/2014/main" id="{CB4E28E2-B3CE-84F7-A0D6-B55469343289}"/>
+              </a:ext>
+            </a:extLst>
+          </p:cNvPr>
+          <p:cNvSpPr>
+            <a:spLocks noGrp="1"/>
+          </p:cNvSpPr>
+          <p:nvPr>
+            <p:ph type="title"/>
+          </p:nvPr>
+        </p:nvSpPr>
+        <p:spPr/>
+        <p:txBody>
+          <a:bodyPr/>
+          <a:lstStyle/>
+          <a:p>
+            <a:r>
+              <a:rPr lang="en-US" altLang="zh-TW" dirty="0"/>
+              <a:t>Flexible Learning (Week 17-18) </a:t>
+            </a:r>
+            <a:endParaRPr lang="zh-TW" altLang="en-US" dirty="0"/>
+          </a:p>
+        </p:txBody>
+      </p:sp>
+      <p:sp>
+        <p:nvSpPr>
+          <p:cNvPr id="3" name="內容版面配置區 2">
+            <a:extLst>
+              <a:ext uri="{FF2B5EF4-FFF2-40B4-BE49-F238E27FC236}">
+                <a16:creationId xmlns:a16="http://schemas.microsoft.com/office/drawing/2014/main" id="{F531441B-395D-7229-A63C-C9478D2B461C}"/>
+              </a:ext>
+            </a:extLst>
+          </p:cNvPr>
+          <p:cNvSpPr>
+            <a:spLocks noGrp="1"/>
+          </p:cNvSpPr>
+          <p:nvPr>
+            <p:ph idx="1"/>
+          </p:nvPr>
+        </p:nvSpPr>
+        <p:spPr/>
+        <p:txBody>
+          <a:bodyPr/>
+          <a:lstStyle/>
+          <a:p>
+            <a:r>
+              <a:rPr lang="en-US" altLang="zh-TW" dirty="0"/>
+              <a:t>Group-based term project implementation and presentation</a:t>
+            </a:r>
+          </a:p>
+          <a:p>
+            <a:pPr lvl="1"/>
+            <a:r>
+              <a:rPr lang="en-US" altLang="zh-TW" dirty="0"/>
+              <a:t> Online</a:t>
+            </a:r>
+          </a:p>
+          <a:p>
+            <a:pPr lvl="1"/>
+            <a:endParaRPr lang="en-US" altLang="zh-TW" dirty="0"/>
+          </a:p>
+          <a:p>
+            <a:r>
+              <a:rPr lang="en-US" altLang="zh-TW" dirty="0"/>
+              <a:t>Submission for make-up </a:t>
+            </a:r>
+            <a:r>
+              <a:rPr lang="en-US" altLang="zh-TW" dirty="0" err="1"/>
+              <a:t>homeworks</a:t>
+            </a:r>
+            <a:r>
+              <a:rPr lang="en-US" altLang="zh-TW" dirty="0"/>
+              <a:t>, and extra bonus</a:t>
+            </a:r>
+          </a:p>
+          <a:p>
+            <a:pPr lvl="1"/>
+            <a:r>
+              <a:rPr lang="en-US" altLang="zh-TW" dirty="0"/>
+              <a:t>No more than 10% of the total score</a:t>
+            </a:r>
+          </a:p>
+          <a:p>
+            <a:pPr lvl="1"/>
+            <a:endParaRPr lang="zh-TW" altLang="en-US" dirty="0"/>
+          </a:p>
+        </p:txBody>
+      </p:sp>
+      <p:sp>
+        <p:nvSpPr>
+          <p:cNvPr id="4" name="日期版面配置區 3">
+            <a:extLst>
+              <a:ext uri="{FF2B5EF4-FFF2-40B4-BE49-F238E27FC236}">
+                <a16:creationId xmlns:a16="http://schemas.microsoft.com/office/drawing/2014/main" id="{D892F958-AD74-D5EB-5987-319852C9C13F}"/>
+              </a:ext>
+            </a:extLst>
+          </p:cNvPr>
+          <p:cNvSpPr>
+            <a:spLocks noGrp="1"/>
+          </p:cNvSpPr>
+          <p:nvPr>
+            <p:ph type="dt" sz="half" idx="10"/>
+          </p:nvPr>
+        </p:nvSpPr>
+        <p:spPr/>
+        <p:txBody>
+          <a:bodyPr/>
+          <a:lstStyle/>
+          <a:p>
+            <a:pPr>
+              <a:defRPr/>
+            </a:pPr>
+            <a:r>
+              <a:rPr lang="en-US" altLang="zh-TW"/>
+              <a:t>Introduction to Big Data Analytics, Fall 2026</a:t>
+            </a:r>
+          </a:p>
+        </p:txBody>
+      </p:sp>
+      <p:sp>
+        <p:nvSpPr>
+          <p:cNvPr id="5" name="頁尾版面配置區 4">
+            <a:extLst>
+              <a:ext uri="{FF2B5EF4-FFF2-40B4-BE49-F238E27FC236}">
+                <a16:creationId xmlns:a16="http://schemas.microsoft.com/office/drawing/2014/main" id="{53BF9C30-DBCD-7AB5-6499-17C0BF1FB3A1}"/>
+              </a:ext>
+            </a:extLst>
+          </p:cNvPr>
+          <p:cNvSpPr>
+            <a:spLocks noGrp="1"/>
+          </p:cNvSpPr>
+          <p:nvPr>
+            <p:ph type="ftr" sz="quarter" idx="11"/>
+          </p:nvPr>
+        </p:nvSpPr>
+        <p:spPr/>
+        <p:txBody>
+          <a:bodyPr/>
+          <a:lstStyle/>
+          <a:p>
+            <a:pPr>
+              <a:defRPr/>
+            </a:pPr>
+            <a:r>
+              <a:rPr lang="en-US" altLang="zh-TW"/>
+              <a:t>NTUT CSIE</a:t>
+            </a:r>
+          </a:p>
+        </p:txBody>
+      </p:sp>
+      <p:sp>
+        <p:nvSpPr>
+          <p:cNvPr id="6" name="投影片編號版面配置區 5">
+            <a:extLst>
+              <a:ext uri="{FF2B5EF4-FFF2-40B4-BE49-F238E27FC236}">
+                <a16:creationId xmlns:a16="http://schemas.microsoft.com/office/drawing/2014/main" id="{7ABDC966-2E84-944A-78DA-F6F70FA62B07}"/>
+              </a:ext>
+            </a:extLst>
+          </p:cNvPr>
+          <p:cNvSpPr>
+            <a:spLocks noGrp="1"/>
+          </p:cNvSpPr>
+          <p:nvPr>
+            <p:ph type="sldNum" sz="quarter" idx="12"/>
+          </p:nvPr>
+        </p:nvSpPr>
+        <p:spPr/>
+        <p:txBody>
+          <a:bodyPr/>
+          <a:lstStyle/>
+          <a:p>
+            <a:pPr>
+              <a:defRPr/>
+            </a:pPr>
+            <a:fld id="{02CE3ACE-715B-42EB-8112-DFB5C547F31F}" type="slidenum">
+              <a:rPr lang="en-US" altLang="zh-TW" smtClean="0"/>
+              <a:pPr>
+                <a:defRPr/>
+              </a:pPr>
+              <a:t>24</a:t>
+            </a:fld>
+            <a:endParaRPr lang="en-US" altLang="zh-TW"/>
+          </a:p>
+        </p:txBody>
+      </p:sp>
+    </p:spTree>
+    <p:extLst>
+      <p:ext uri="{BB962C8B-B14F-4D97-AF65-F5344CB8AC3E}">
+        <p14:creationId xmlns:p14="http://schemas.microsoft.com/office/powerpoint/2010/main" val="105923457"/>
+      </p:ext>
+    </p:extLst>
+  </p:cSld>
+  <p:clrMapOvr>
+    <a:masterClrMapping/>
+  </p:clrMapOvr>
+</p:sld>
+</file>
+
+<file path=ppt/slides/slide25.xml><?xml version="1.0" encoding="utf-8"?>
+<p:sld xmlns:a="http://schemas.openxmlformats.org/drawingml/2006/main" xmlns:r="http://schemas.openxmlformats.org/officeDocument/2006/relationships" xmlns:p="http://schemas.openxmlformats.org/presentationml/2006/main">
+  <p:cSld>
+    <p:spTree>
+      <p:nvGrpSpPr>
+        <p:cNvPr id="1" name=""/>
+        <p:cNvGrpSpPr/>
+        <p:nvPr/>
+      </p:nvGrpSpPr>
+      <p:grpSpPr>
+        <a:xfrm>
+          <a:off x="0" y="0"/>
+          <a:ext cx="0" cy="0"/>
+          <a:chOff x="0" y="0"/>
+          <a:chExt cx="0" cy="0"/>
+        </a:xfrm>
+      </p:grpSpPr>
+      <p:sp>
+        <p:nvSpPr>
           <p:cNvPr id="50178" name="標題 1"/>
           <p:cNvSpPr>
             <a:spLocks noGrp="1"/>
@@ -19679,7 +19964,7 @@
                 <a:buFontTx/>
                 <a:buNone/>
               </a:pPr>
-              <a:t>24</a:t>
+              <a:t>25</a:t>
             </a:fld>
             <a:endParaRPr kumimoji="0" lang="en-US" altLang="zh-TW" sz="1400">
               <a:latin typeface="Arial" panose="020B0604020202020204" pitchFamily="34" charset="0"/>
@@ -19695,7 +19980,7 @@
 </p:sld>
 </file>
 
-<file path=ppt/slides/slide25.xml><?xml version="1.0" encoding="utf-8"?>
+<file path=ppt/slides/slide26.xml><?xml version="1.0" encoding="utf-8"?>
 <p:sld xmlns:a="http://schemas.openxmlformats.org/drawingml/2006/main" xmlns:r="http://schemas.openxmlformats.org/officeDocument/2006/relationships" xmlns:p="http://schemas.openxmlformats.org/presentationml/2006/main">
   <p:cSld>
     <p:spTree>
@@ -20337,7 +20622,7 @@
                 <a:buFontTx/>
                 <a:buNone/>
               </a:pPr>
-              <a:t>25</a:t>
+              <a:t>26</a:t>
             </a:fld>
             <a:endParaRPr kumimoji="0" lang="en-US" altLang="zh-TW" sz="1400">
               <a:latin typeface="Arial" panose="020B0604020202020204" pitchFamily="34" charset="0"/>
@@ -20353,7 +20638,7 @@
 </p:sld>
 </file>
 
-<file path=ppt/slides/slide26.xml><?xml version="1.0" encoding="utf-8"?>
+<file path=ppt/slides/slide27.xml><?xml version="1.0" encoding="utf-8"?>
 <p:sld xmlns:a="http://schemas.openxmlformats.org/drawingml/2006/main" xmlns:r="http://schemas.openxmlformats.org/officeDocument/2006/relationships" xmlns:p="http://schemas.openxmlformats.org/presentationml/2006/main">
   <p:cSld>
     <p:spTree>
@@ -20406,7 +20691,7 @@
         <p:spPr/>
         <p:txBody>
           <a:bodyPr>
-            <a:normAutofit fontScale="92500" lnSpcReduction="10000"/>
+            <a:normAutofit fontScale="92500" lnSpcReduction="20000"/>
           </a:bodyPr>
           <a:lstStyle/>
           <a:p>
@@ -20502,28 +20787,41 @@
             </a:r>
           </a:p>
           <a:p>
+            <a:pPr lvl="2">
+              <a:defRPr/>
+            </a:pPr>
+            <a:r>
+              <a:rPr lang="en-US" altLang="zh-TW" dirty="0"/>
+              <a:t>But simply running existing binary codes or commercial tools is </a:t>
+            </a:r>
+            <a:r>
+              <a:rPr lang="en-US" altLang="zh-TW" b="1" dirty="0">
+                <a:solidFill>
+                  <a:srgbClr val="0000FF"/>
+                </a:solidFill>
+              </a:rPr>
+              <a:t>NOT</a:t>
+            </a:r>
+            <a:r>
+              <a:rPr lang="en-US" altLang="zh-TW" dirty="0">
+                <a:solidFill>
+                  <a:srgbClr val="0000FF"/>
+                </a:solidFill>
+              </a:rPr>
+              <a:t> acceptable</a:t>
+            </a:r>
+          </a:p>
+          <a:p>
             <a:pPr lvl="1">
               <a:defRPr/>
             </a:pPr>
             <a:r>
-              <a:rPr lang="en-US" altLang="zh-TW" dirty="0"/>
-              <a:t>But simply running existing binary codes or commercial tools is </a:t>
-            </a:r>
-            <a:r>
-              <a:rPr lang="en-US" altLang="zh-TW" b="1" dirty="0">
-                <a:solidFill>
-                  <a:srgbClr val="0000FF"/>
+              <a:rPr lang="en-US" altLang="zh-TW" dirty="0">
+                <a:solidFill>
+                  <a:srgbClr val="FF0000"/>
                 </a:solidFill>
               </a:rPr>
-              <a:t>NOT</a:t>
-            </a:r>
-            <a:r>
-              <a:rPr lang="en-US" altLang="zh-TW" dirty="0">
-                <a:solidFill>
-                  <a:srgbClr val="0000FF"/>
-                </a:solidFill>
-              </a:rPr>
-              <a:t> acceptable</a:t>
+              <a:t>You have to explain the major part of your code</a:t>
             </a:r>
           </a:p>
           <a:p>
@@ -21063,7 +21361,7 @@
                 <a:buFontTx/>
                 <a:buNone/>
               </a:pPr>
-              <a:t>26</a:t>
+              <a:t>27</a:t>
             </a:fld>
             <a:endParaRPr kumimoji="0" lang="en-US" altLang="zh-TW" sz="1400">
               <a:latin typeface="Arial" panose="020B0604020202020204" pitchFamily="34" charset="0"/>
@@ -21079,7 +21377,7 @@
 </p:sld>
 </file>
 
-<file path=ppt/slides/slide27.xml><?xml version="1.0" encoding="utf-8"?>
+<file path=ppt/slides/slide28.xml><?xml version="1.0" encoding="utf-8"?>
 <p:sld xmlns:a="http://schemas.openxmlformats.org/drawingml/2006/main" xmlns:r="http://schemas.openxmlformats.org/officeDocument/2006/relationships" xmlns:p="http://schemas.openxmlformats.org/presentationml/2006/main">
   <p:cSld>
     <p:spTree>
@@ -21661,7 +21959,7 @@
                 <a:buFontTx/>
                 <a:buNone/>
               </a:pPr>
-              <a:t>27</a:t>
+              <a:t>28</a:t>
             </a:fld>
             <a:endParaRPr kumimoji="0" lang="en-US" altLang="zh-TW" sz="1400">
               <a:latin typeface="Arial" panose="020B0604020202020204" pitchFamily="34" charset="0"/>
@@ -21731,7 +22029,7 @@
 </p:sld>
 </file>
 
-<file path=ppt/slides/slide28.xml><?xml version="1.0" encoding="utf-8"?>
+<file path=ppt/slides/slide29.xml><?xml version="1.0" encoding="utf-8"?>
 <p:sld xmlns:a="http://schemas.openxmlformats.org/drawingml/2006/main" xmlns:r="http://schemas.openxmlformats.org/officeDocument/2006/relationships" xmlns:p="http://schemas.openxmlformats.org/presentationml/2006/main">
   <p:cSld>
     <p:spTree>
@@ -22239,7 +22537,7 @@
                 <a:buFontTx/>
                 <a:buNone/>
               </a:pPr>
-              <a:t>28</a:t>
+              <a:t>29</a:t>
             </a:fld>
             <a:endParaRPr kumimoji="0" lang="en-US" altLang="zh-TW" sz="1400">
               <a:latin typeface="Arial" panose="020B0604020202020204" pitchFamily="34" charset="0"/>
@@ -22947,7 +23245,7 @@
             </a:pPr>
             <a:r>
               <a:rPr lang="en-US" altLang="zh-TW" sz="2800" dirty="0"/>
-              <a:t>Classes will be in-person, offered at Sophomore level</a:t>
+              <a:t>Classes will be in-person, offered at sophomore level</a:t>
             </a:r>
           </a:p>
           <a:p>
